--- a/classes/parte-5-explotacion-de-sistemas-y-binarios/135-ofuscacion-y-tecnicas-anti-reversing/clase-135-presentacion.pptx
+++ b/classes/parte-5-explotacion-de-sistemas-y-binarios/135-ofuscacion-y-tecnicas-anti-reversing/clase-135-presentacion.pptx
@@ -17,6 +17,9 @@
     <p:sldId id="265" r:id="rId16"/>
     <p:sldId id="266" r:id="rId17"/>
     <p:sldId id="267" r:id="rId18"/>
+    <p:sldId id="268" r:id="rId19"/>
+    <p:sldId id="269" r:id="rId20"/>
+    <p:sldId id="270" r:id="rId21"/>
   </p:sldIdLst>
   <p:sldSz cx="9144000" cy="6858000" type="screen4x3"/>
   <p:notesSz cx="6858000" cy="9144000"/>
@@ -3198,7 +3201,7 @@
                   <a:srgbClr val="0B3D2E"/>
                 </a:solidFill>
               </a:rPr>
-              <a:t>⚠️ Errores comunes</a:t>
+              <a:t>✍️ Ejercicios</a:t>
             </a:r>
           </a:p>
         </p:txBody>
@@ -3236,67 +3239,82 @@
                   <a:srgbClr val="22282E"/>
                 </a:solidFill>
               </a:rPr>
-              <a:t>•  El programa muere al adjuntar GDB — Anti-debug con ptrace; parchea o hookea</a:t>
-            </a:r>
-          </a:p>
-          <a:p>
-            <a:pPr>
-              <a:spcAft>
-                <a:spcPts val="600"/>
-              </a:spcAft>
-            </a:pPr>
-            <a:r>
-              <a:rPr sz="1500">
-                <a:solidFill>
-                  <a:srgbClr val="22282E"/>
-                </a:solidFill>
-              </a:rPr>
-              <a:t>•  upx -d falla — No es UPX o está modificado; usa dump en runtime</a:t>
-            </a:r>
-          </a:p>
-          <a:p>
-            <a:pPr>
-              <a:spcAft>
-                <a:spcPts val="600"/>
-              </a:spcAft>
-            </a:pPr>
-            <a:r>
-              <a:rPr sz="1500">
-                <a:solidFill>
-                  <a:srgbClr val="22282E"/>
-                </a:solidFill>
-              </a:rPr>
-              <a:t>•  angr no termina — State explosion; acota con hooks/constraints</a:t>
-            </a:r>
-          </a:p>
-          <a:p>
-            <a:pPr>
-              <a:spcAft>
-                <a:spcPts val="600"/>
-              </a:spcAft>
-            </a:pPr>
-            <a:r>
-              <a:rPr sz="1500">
-                <a:solidFill>
-                  <a:srgbClr val="22282E"/>
-                </a:solidFill>
-              </a:rPr>
-              <a:t>•  Entropía alta pero no es packing — Puede ser datos comprimidos legítimos; verifica secciones</a:t>
-            </a:r>
-          </a:p>
-          <a:p>
-            <a:pPr>
-              <a:spcAft>
-                <a:spcPts val="600"/>
-              </a:spcAft>
-            </a:pPr>
-            <a:r>
-              <a:rPr sz="1500">
-                <a:solidFill>
-                  <a:srgbClr val="22282E"/>
-                </a:solidFill>
-              </a:rPr>
-              <a:t>•  Parcheo rompe el binario — Cambiaste tamaño; parchea solo bytes de opcode equivalentes</a:t>
+              <a:t>•  Calcula la entropía de un binario normal y de uno empacado; compara.</a:t>
+            </a:r>
+          </a:p>
+          <a:p>
+            <a:pPr>
+              <a:spcAft>
+                <a:spcPts val="600"/>
+              </a:spcAft>
+            </a:pPr>
+            <a:r>
+              <a:rPr sz="1500">
+                <a:solidFill>
+                  <a:srgbClr val="22282E"/>
+                </a:solidFill>
+              </a:rPr>
+              <a:t>•  Desempaqueta un UPX y confirma con objdump que ves más funciones.</a:t>
+            </a:r>
+          </a:p>
+          <a:p>
+            <a:pPr>
+              <a:spcAft>
+                <a:spcPts val="600"/>
+              </a:spcAft>
+            </a:pPr>
+            <a:r>
+              <a:rPr sz="1500">
+                <a:solidFill>
+                  <a:srgbClr val="22282E"/>
+                </a:solidFill>
+              </a:rPr>
+              <a:t>•  Parchea un chequeo ptrace para permitir el debugging.</a:t>
+            </a:r>
+          </a:p>
+          <a:p>
+            <a:pPr>
+              <a:spcAft>
+                <a:spcPts val="600"/>
+              </a:spcAft>
+            </a:pPr>
+            <a:r>
+              <a:rPr sz="1500">
+                <a:solidFill>
+                  <a:srgbClr val="22282E"/>
+                </a:solidFill>
+              </a:rPr>
+              <a:t>•  Intercepta el anti-debug con Frida sin modificar el binario.</a:t>
+            </a:r>
+          </a:p>
+          <a:p>
+            <a:pPr>
+              <a:spcAft>
+                <a:spcPts val="600"/>
+              </a:spcAft>
+            </a:pPr>
+            <a:r>
+              <a:rPr sz="1500">
+                <a:solidFill>
+                  <a:srgbClr val="22282E"/>
+                </a:solidFill>
+              </a:rPr>
+              <a:t>•  Resuelve un crackme con angr y explica sus límites (state explosion).</a:t>
+            </a:r>
+          </a:p>
+          <a:p>
+            <a:pPr>
+              <a:spcAft>
+                <a:spcPts val="600"/>
+              </a:spcAft>
+            </a:pPr>
+            <a:r>
+              <a:rPr sz="1500">
+                <a:solidFill>
+                  <a:srgbClr val="22282E"/>
+                </a:solidFill>
+              </a:rPr>
+              <a:t>•  Identifica el dispatcher de un binario con control-flow flattening.</a:t>
             </a:r>
           </a:p>
         </p:txBody>
@@ -3347,7 +3365,7 @@
                   <a:srgbClr val="0B3D2E"/>
                 </a:solidFill>
               </a:rPr>
-              <a:t>❓ Preguntas frecuentes</a:t>
+              <a:t>📝 Reto verificable</a:t>
             </a:r>
           </a:p>
         </p:txBody>
@@ -3385,82 +3403,52 @@
                   <a:srgbClr val="22282E"/>
                 </a:solidFill>
               </a:rPr>
-              <a:t>•  ❓ ¿Se puede revertir cualquier ofuscación? En teoría sí con esfuerzo suficiente; la virtualización</a:t>
-            </a:r>
-          </a:p>
-          <a:p>
-            <a:pPr>
-              <a:spcAft>
-                <a:spcPts val="600"/>
-              </a:spcAft>
-            </a:pPr>
-            <a:r>
-              <a:rPr sz="1500">
-                <a:solidFill>
-                  <a:srgbClr val="22282E"/>
-                </a:solidFill>
-              </a:rPr>
-              <a:t>•  puede requerir semanas.</a:t>
-            </a:r>
-          </a:p>
-          <a:p>
-            <a:pPr>
-              <a:spcAft>
-                <a:spcPts val="600"/>
-              </a:spcAft>
-            </a:pPr>
-            <a:r>
-              <a:rPr sz="1500">
-                <a:solidFill>
-                  <a:srgbClr val="22282E"/>
-                </a:solidFill>
-              </a:rPr>
-              <a:t>•  ❓ ¿angr es una bala de plata? No: sufre explosión de estados; úsalo con acotaciones y para</a:t>
-            </a:r>
-          </a:p>
-          <a:p>
-            <a:pPr>
-              <a:spcAft>
-                <a:spcPts val="600"/>
-              </a:spcAft>
-            </a:pPr>
-            <a:r>
-              <a:rPr sz="1500">
-                <a:solidFill>
-                  <a:srgbClr val="22282E"/>
-                </a:solidFill>
-              </a:rPr>
-              <a:t>•  funciones concretas.</a:t>
-            </a:r>
-          </a:p>
-          <a:p>
-            <a:pPr>
-              <a:spcAft>
-                <a:spcPts val="600"/>
-              </a:spcAft>
-            </a:pPr>
-            <a:r>
-              <a:rPr sz="1500">
-                <a:solidFill>
-                  <a:srgbClr val="22282E"/>
-                </a:solidFill>
-              </a:rPr>
-              <a:t>•  ❓ ¿Ofuscar mi software lo hace seguro? Aumenta el coste del atacante, pero no sustituye a una buena</a:t>
-            </a:r>
-          </a:p>
-          <a:p>
-            <a:pPr>
-              <a:spcAft>
-                <a:spcPts val="600"/>
-              </a:spcAft>
-            </a:pPr>
-            <a:r>
-              <a:rPr sz="1500">
-                <a:solidFill>
-                  <a:srgbClr val="22282E"/>
-                </a:solidFill>
-              </a:rPr>
-              <a:t>•  arquitectura de seguridad.</a:t>
+              <a:t>•  Toma un crackme empacado con anti-debugging y consigue analizarlo: desempácalo, neutraliza el</a:t>
+            </a:r>
+          </a:p>
+          <a:p>
+            <a:pPr>
+              <a:spcAft>
+                <a:spcPts val="600"/>
+              </a:spcAft>
+            </a:pPr>
+            <a:r>
+              <a:rPr sz="1500">
+                <a:solidFill>
+                  <a:srgbClr val="22282E"/>
+                </a:solidFill>
+              </a:rPr>
+              <a:t>•  anti-debug y deduce la clave.</a:t>
+            </a:r>
+          </a:p>
+          <a:p>
+            <a:pPr>
+              <a:spcAft>
+                <a:spcPts val="600"/>
+              </a:spcAft>
+            </a:pPr>
+            <a:r>
+              <a:rPr sz="1500">
+                <a:solidFill>
+                  <a:srgbClr val="22282E"/>
+                </a:solidFill>
+              </a:rPr>
+              <a:t>•  Criterio de aceptación: logras adjuntar un debugger pese al anti-debug (parcheo o Frida) y obtienes</a:t>
+            </a:r>
+          </a:p>
+          <a:p>
+            <a:pPr>
+              <a:spcAft>
+                <a:spcPts val="600"/>
+              </a:spcAft>
+            </a:pPr>
+            <a:r>
+              <a:rPr sz="1500">
+                <a:solidFill>
+                  <a:srgbClr val="22282E"/>
+                </a:solidFill>
+              </a:rPr>
+              <a:t>•  la clave válida del binario desempacado.</a:t>
             </a:r>
           </a:p>
         </p:txBody>
@@ -3511,7 +3499,7 @@
                   <a:srgbClr val="0B3D2E"/>
                 </a:solidFill>
               </a:rPr>
-              <a:t>🔗 Referencias</a:t>
+              <a:t>⚠️ Errores comunes</a:t>
             </a:r>
           </a:p>
         </p:txBody>
@@ -3549,6 +3537,319 @@
                   <a:srgbClr val="22282E"/>
                 </a:solidFill>
               </a:rPr>
+              <a:t>•  El programa muere al adjuntar GDB — Anti-debug con ptrace; parchea o hookea</a:t>
+            </a:r>
+          </a:p>
+          <a:p>
+            <a:pPr>
+              <a:spcAft>
+                <a:spcPts val="600"/>
+              </a:spcAft>
+            </a:pPr>
+            <a:r>
+              <a:rPr sz="1500">
+                <a:solidFill>
+                  <a:srgbClr val="22282E"/>
+                </a:solidFill>
+              </a:rPr>
+              <a:t>•  upx -d falla — No es UPX o está modificado; usa dump en runtime</a:t>
+            </a:r>
+          </a:p>
+          <a:p>
+            <a:pPr>
+              <a:spcAft>
+                <a:spcPts val="600"/>
+              </a:spcAft>
+            </a:pPr>
+            <a:r>
+              <a:rPr sz="1500">
+                <a:solidFill>
+                  <a:srgbClr val="22282E"/>
+                </a:solidFill>
+              </a:rPr>
+              <a:t>•  angr no termina — State explosion; acota con hooks/constraints</a:t>
+            </a:r>
+          </a:p>
+          <a:p>
+            <a:pPr>
+              <a:spcAft>
+                <a:spcPts val="600"/>
+              </a:spcAft>
+            </a:pPr>
+            <a:r>
+              <a:rPr sz="1500">
+                <a:solidFill>
+                  <a:srgbClr val="22282E"/>
+                </a:solidFill>
+              </a:rPr>
+              <a:t>•  Entropía alta pero no es packing — Puede ser datos comprimidos legítimos; verifica secciones</a:t>
+            </a:r>
+          </a:p>
+          <a:p>
+            <a:pPr>
+              <a:spcAft>
+                <a:spcPts val="600"/>
+              </a:spcAft>
+            </a:pPr>
+            <a:r>
+              <a:rPr sz="1500">
+                <a:solidFill>
+                  <a:srgbClr val="22282E"/>
+                </a:solidFill>
+              </a:rPr>
+              <a:t>•  Parcheo rompe el binario — Cambiaste tamaño; parchea solo bytes de opcode equivalentes</a:t>
+            </a:r>
+          </a:p>
+        </p:txBody>
+      </p:sp>
+    </p:spTree>
+  </p:cSld>
+  <p:clrMapOvr>
+    <a:masterClrMapping/>
+  </p:clrMapOvr>
+</p:sld>
+</file>
+
+<file path=ppt/slides/slide13.xml><?xml version="1.0" encoding="utf-8"?>
+<p:sld xmlns:a="http://schemas.openxmlformats.org/drawingml/2006/main" xmlns:p="http://schemas.openxmlformats.org/presentationml/2006/main" xmlns:r="http://schemas.openxmlformats.org/officeDocument/2006/relationships">
+  <p:cSld>
+    <p:spTree>
+      <p:nvGrpSpPr>
+        <p:cNvPr id="1" name=""/>
+        <p:cNvGrpSpPr/>
+        <p:nvPr/>
+      </p:nvGrpSpPr>
+      <p:grpSpPr/>
+      <p:sp>
+        <p:nvSpPr>
+          <p:cNvPr id="2" name="TextBox 1"/>
+          <p:cNvSpPr txBox="1"/>
+          <p:nvPr/>
+        </p:nvSpPr>
+        <p:spPr>
+          <a:xfrm>
+            <a:off x="457200" y="320040"/>
+            <a:ext cx="8229600" cy="822960"/>
+          </a:xfrm>
+          <a:prstGeom prst="rect">
+            <a:avLst/>
+          </a:prstGeom>
+          <a:noFill/>
+        </p:spPr>
+        <p:txBody>
+          <a:bodyPr wrap="square">
+            <a:spAutoFit/>
+          </a:bodyPr>
+          <a:lstStyle/>
+          <a:p>
+            <a:r>
+              <a:rPr sz="2600" b="1">
+                <a:solidFill>
+                  <a:srgbClr val="0B3D2E"/>
+                </a:solidFill>
+              </a:rPr>
+              <a:t>❓ Preguntas frecuentes</a:t>
+            </a:r>
+          </a:p>
+        </p:txBody>
+      </p:sp>
+      <p:sp>
+        <p:nvSpPr>
+          <p:cNvPr id="3" name="TextBox 2"/>
+          <p:cNvSpPr txBox="1"/>
+          <p:nvPr/>
+        </p:nvSpPr>
+        <p:spPr>
+          <a:xfrm>
+            <a:off x="457200" y="1280160"/>
+            <a:ext cx="8229600" cy="4937760"/>
+          </a:xfrm>
+          <a:prstGeom prst="rect">
+            <a:avLst/>
+          </a:prstGeom>
+          <a:noFill/>
+        </p:spPr>
+        <p:txBody>
+          <a:bodyPr wrap="square">
+            <a:spAutoFit/>
+          </a:bodyPr>
+          <a:lstStyle/>
+          <a:p>
+            <a:pPr>
+              <a:spcAft>
+                <a:spcPts val="600"/>
+              </a:spcAft>
+            </a:pPr>
+            <a:r>
+              <a:rPr sz="1500">
+                <a:solidFill>
+                  <a:srgbClr val="22282E"/>
+                </a:solidFill>
+              </a:rPr>
+              <a:t>•  ❓ ¿Se puede revertir cualquier ofuscación? En teoría sí con esfuerzo suficiente; la virtualización</a:t>
+            </a:r>
+          </a:p>
+          <a:p>
+            <a:pPr>
+              <a:spcAft>
+                <a:spcPts val="600"/>
+              </a:spcAft>
+            </a:pPr>
+            <a:r>
+              <a:rPr sz="1500">
+                <a:solidFill>
+                  <a:srgbClr val="22282E"/>
+                </a:solidFill>
+              </a:rPr>
+              <a:t>•  puede requerir semanas.</a:t>
+            </a:r>
+          </a:p>
+          <a:p>
+            <a:pPr>
+              <a:spcAft>
+                <a:spcPts val="600"/>
+              </a:spcAft>
+            </a:pPr>
+            <a:r>
+              <a:rPr sz="1500">
+                <a:solidFill>
+                  <a:srgbClr val="22282E"/>
+                </a:solidFill>
+              </a:rPr>
+              <a:t>•  ❓ ¿angr es una bala de plata? No: sufre explosión de estados; úsalo con acotaciones y para</a:t>
+            </a:r>
+          </a:p>
+          <a:p>
+            <a:pPr>
+              <a:spcAft>
+                <a:spcPts val="600"/>
+              </a:spcAft>
+            </a:pPr>
+            <a:r>
+              <a:rPr sz="1500">
+                <a:solidFill>
+                  <a:srgbClr val="22282E"/>
+                </a:solidFill>
+              </a:rPr>
+              <a:t>•  funciones concretas.</a:t>
+            </a:r>
+          </a:p>
+          <a:p>
+            <a:pPr>
+              <a:spcAft>
+                <a:spcPts val="600"/>
+              </a:spcAft>
+            </a:pPr>
+            <a:r>
+              <a:rPr sz="1500">
+                <a:solidFill>
+                  <a:srgbClr val="22282E"/>
+                </a:solidFill>
+              </a:rPr>
+              <a:t>•  ❓ ¿Ofuscar mi software lo hace seguro? Aumenta el coste del atacante, pero no sustituye a una buena</a:t>
+            </a:r>
+          </a:p>
+          <a:p>
+            <a:pPr>
+              <a:spcAft>
+                <a:spcPts val="600"/>
+              </a:spcAft>
+            </a:pPr>
+            <a:r>
+              <a:rPr sz="1500">
+                <a:solidFill>
+                  <a:srgbClr val="22282E"/>
+                </a:solidFill>
+              </a:rPr>
+              <a:t>•  arquitectura de seguridad.</a:t>
+            </a:r>
+          </a:p>
+        </p:txBody>
+      </p:sp>
+    </p:spTree>
+  </p:cSld>
+  <p:clrMapOvr>
+    <a:masterClrMapping/>
+  </p:clrMapOvr>
+</p:sld>
+</file>
+
+<file path=ppt/slides/slide14.xml><?xml version="1.0" encoding="utf-8"?>
+<p:sld xmlns:a="http://schemas.openxmlformats.org/drawingml/2006/main" xmlns:p="http://schemas.openxmlformats.org/presentationml/2006/main" xmlns:r="http://schemas.openxmlformats.org/officeDocument/2006/relationships">
+  <p:cSld>
+    <p:spTree>
+      <p:nvGrpSpPr>
+        <p:cNvPr id="1" name=""/>
+        <p:cNvGrpSpPr/>
+        <p:nvPr/>
+      </p:nvGrpSpPr>
+      <p:grpSpPr/>
+      <p:sp>
+        <p:nvSpPr>
+          <p:cNvPr id="2" name="TextBox 1"/>
+          <p:cNvSpPr txBox="1"/>
+          <p:nvPr/>
+        </p:nvSpPr>
+        <p:spPr>
+          <a:xfrm>
+            <a:off x="457200" y="320040"/>
+            <a:ext cx="8229600" cy="822960"/>
+          </a:xfrm>
+          <a:prstGeom prst="rect">
+            <a:avLst/>
+          </a:prstGeom>
+          <a:noFill/>
+        </p:spPr>
+        <p:txBody>
+          <a:bodyPr wrap="square">
+            <a:spAutoFit/>
+          </a:bodyPr>
+          <a:lstStyle/>
+          <a:p>
+            <a:r>
+              <a:rPr sz="2600" b="1">
+                <a:solidFill>
+                  <a:srgbClr val="0B3D2E"/>
+                </a:solidFill>
+              </a:rPr>
+              <a:t>🔗 Referencias</a:t>
+            </a:r>
+          </a:p>
+        </p:txBody>
+      </p:sp>
+      <p:sp>
+        <p:nvSpPr>
+          <p:cNvPr id="3" name="TextBox 2"/>
+          <p:cNvSpPr txBox="1"/>
+          <p:nvPr/>
+        </p:nvSpPr>
+        <p:spPr>
+          <a:xfrm>
+            <a:off x="457200" y="1280160"/>
+            <a:ext cx="8229600" cy="4937760"/>
+          </a:xfrm>
+          <a:prstGeom prst="rect">
+            <a:avLst/>
+          </a:prstGeom>
+          <a:noFill/>
+        </p:spPr>
+        <p:txBody>
+          <a:bodyPr wrap="square">
+            <a:spAutoFit/>
+          </a:bodyPr>
+          <a:lstStyle/>
+          <a:p>
+            <a:pPr>
+              <a:spcAft>
+                <a:spcPts val="600"/>
+              </a:spcAft>
+            </a:pPr>
+            <a:r>
+              <a:rPr sz="1500">
+                <a:solidFill>
+                  <a:srgbClr val="22282E"/>
+                </a:solidFill>
+              </a:rPr>
               <a:t>•  Eilam, E. Reversing: Secrets of Reverse Engineering. Wiley.</a:t>
             </a:r>
           </a:p>
@@ -3599,6 +3900,81 @@
           </a:p>
         </p:txBody>
       </p:sp>
+    </p:spTree>
+  </p:cSld>
+  <p:clrMapOvr>
+    <a:masterClrMapping/>
+  </p:clrMapOvr>
+</p:sld>
+</file>
+
+<file path=ppt/slides/slide15.xml><?xml version="1.0" encoding="utf-8"?>
+<p:sld xmlns:a="http://schemas.openxmlformats.org/drawingml/2006/main" xmlns:p="http://schemas.openxmlformats.org/presentationml/2006/main" xmlns:r="http://schemas.openxmlformats.org/officeDocument/2006/relationships">
+  <p:cSld>
+    <p:spTree>
+      <p:nvGrpSpPr>
+        <p:cNvPr id="1" name=""/>
+        <p:cNvGrpSpPr/>
+        <p:nvPr/>
+      </p:nvGrpSpPr>
+      <p:grpSpPr/>
+      <p:sp>
+        <p:nvSpPr>
+          <p:cNvPr id="2" name="TextBox 1"/>
+          <p:cNvSpPr txBox="1"/>
+          <p:nvPr/>
+        </p:nvSpPr>
+        <p:spPr>
+          <a:xfrm>
+            <a:off x="457200" y="274320"/>
+            <a:ext cx="8229600" cy="640080"/>
+          </a:xfrm>
+          <a:prstGeom prst="rect">
+            <a:avLst/>
+          </a:prstGeom>
+          <a:noFill/>
+        </p:spPr>
+        <p:txBody>
+          <a:bodyPr wrap="square">
+            <a:spAutoFit/>
+          </a:bodyPr>
+          <a:lstStyle/>
+          <a:p>
+            <a:r>
+              <a:rPr sz="2200" b="1">
+                <a:solidFill>
+                  <a:srgbClr val="0B3D2E"/>
+                </a:solidFill>
+              </a:rPr>
+              <a:t>Diagrama de la clase</a:t>
+            </a:r>
+          </a:p>
+        </p:txBody>
+      </p:sp>
+      <p:pic>
+        <p:nvPicPr>
+          <p:cNvPr id="3" name="Picture 2" descr="1048092ad38ef924.png"/>
+          <p:cNvPicPr>
+            <a:picLocks noChangeAspect="1"/>
+          </p:cNvPicPr>
+          <p:nvPr/>
+        </p:nvPicPr>
+        <p:blipFill>
+          <a:blip r:embed="rId2"/>
+          <a:stretch>
+            <a:fillRect/>
+          </a:stretch>
+        </p:blipFill>
+        <p:spPr>
+          <a:xfrm>
+            <a:off x="457200" y="2935224"/>
+            <a:ext cx="8229600" cy="1627632"/>
+          </a:xfrm>
+          <a:prstGeom prst="rect">
+            <a:avLst/>
+          </a:prstGeom>
+        </p:spPr>
+      </p:pic>
     </p:spTree>
   </p:cSld>
   <p:clrMapOvr>
@@ -4122,7 +4498,7 @@
                   <a:srgbClr val="0B3D2E"/>
                 </a:solidFill>
               </a:rPr>
-              <a:t>📖 Definiciones y características</a:t>
+              <a:t>🧠 Explicación en profundidad</a:t>
             </a:r>
           </a:p>
         </p:txBody>
@@ -4160,97 +4536,97 @@
                   <a:srgbClr val="22282E"/>
                 </a:solidFill>
               </a:rPr>
-              <a:t>•  Packing: comprime/cifra el binario y lo descomprime en memoria al ejecutar. Clave: el estático</a:t>
-            </a:r>
-          </a:p>
-          <a:p>
-            <a:pPr>
-              <a:spcAft>
-                <a:spcPts val="600"/>
-              </a:spcAft>
-            </a:pPr>
-            <a:r>
-              <a:rPr sz="1500">
-                <a:solidFill>
-                  <a:srgbClr val="22282E"/>
-                </a:solidFill>
-              </a:rPr>
-              <a:t>•  solo ve el stub; hay que dumpear tras el unpacking.</a:t>
-            </a:r>
-          </a:p>
-          <a:p>
-            <a:pPr>
-              <a:spcAft>
-                <a:spcPts val="600"/>
-              </a:spcAft>
-            </a:pPr>
-            <a:r>
-              <a:rPr sz="1500">
-                <a:solidFill>
-                  <a:srgbClr val="22282E"/>
-                </a:solidFill>
-              </a:rPr>
-              <a:t>•  Entropía: medida de aleatoriedad; secciones empacadas/cifradas tienen entropía alta (~8). Clave:</a:t>
-            </a:r>
-          </a:p>
-          <a:p>
-            <a:pPr>
-              <a:spcAft>
-                <a:spcPts val="600"/>
-              </a:spcAft>
-            </a:pPr>
-            <a:r>
-              <a:rPr sz="1500">
-                <a:solidFill>
-                  <a:srgbClr val="22282E"/>
-                </a:solidFill>
-              </a:rPr>
-              <a:t>•  primer indicador de ofuscación.</a:t>
-            </a:r>
-          </a:p>
-          <a:p>
-            <a:pPr>
-              <a:spcAft>
-                <a:spcPts val="600"/>
-              </a:spcAft>
-            </a:pPr>
-            <a:r>
-              <a:rPr sz="1500">
-                <a:solidFill>
-                  <a:srgbClr val="22282E"/>
-                </a:solidFill>
-              </a:rPr>
-              <a:t>•  Anti-debugging: detecta debuggers (p. ej. ptrace(PTRACETRACEME) que falla si ya hay uno).</a:t>
-            </a:r>
-          </a:p>
-          <a:p>
-            <a:pPr>
-              <a:spcAft>
-                <a:spcPts val="600"/>
-              </a:spcAft>
-            </a:pPr>
-            <a:r>
-              <a:rPr sz="1500">
-                <a:solidFill>
-                  <a:srgbClr val="22282E"/>
-                </a:solidFill>
-              </a:rPr>
-              <a:t>•  Clave: se neutraliza parcheando el chequeo o con LDPRELOAD.</a:t>
-            </a:r>
-          </a:p>
-          <a:p>
-            <a:pPr>
-              <a:spcAft>
-                <a:spcPts val="600"/>
-              </a:spcAft>
-            </a:pPr>
-            <a:r>
-              <a:rPr sz="1500">
-                <a:solidFill>
-                  <a:srgbClr val="22282E"/>
-                </a:solidFill>
-              </a:rPr>
-              <a:t>•  Anti-VM: busca artefactos de virtualización (drivers, MAC, timing). Clave: frecuente en malware</a:t>
+              <a:t>•  Si la ingeniería inversa reconstruye el significado de un binario, la ofuscación y las técnicas</a:t>
+            </a:r>
+          </a:p>
+          <a:p>
+            <a:pPr>
+              <a:spcAft>
+                <a:spcPts val="600"/>
+              </a:spcAft>
+            </a:pPr>
+            <a:r>
+              <a:rPr sz="1500">
+                <a:solidFill>
+                  <a:srgbClr val="22282E"/>
+                </a:solidFill>
+              </a:rPr>
+              <a:t>•  anti-reversing existen para impedirlo o encarecerlo. Las usan tanto el software legítimo</a:t>
+            </a:r>
+          </a:p>
+          <a:p>
+            <a:pPr>
+              <a:spcAft>
+                <a:spcPts val="600"/>
+              </a:spcAft>
+            </a:pPr>
+            <a:r>
+              <a:rPr sz="1500">
+                <a:solidFill>
+                  <a:srgbClr val="22282E"/>
+                </a:solidFill>
+              </a:rPr>
+              <a:t>•  (protección de propiedad intelectual, DRM, antitrampas) como —sobre todo— el malware (Parte 6),</a:t>
+            </a:r>
+          </a:p>
+          <a:p>
+            <a:pPr>
+              <a:spcAft>
+                <a:spcPts val="600"/>
+              </a:spcAft>
+            </a:pPr>
+            <a:r>
+              <a:rPr sz="1500">
+                <a:solidFill>
+                  <a:srgbClr val="22282E"/>
+                </a:solidFill>
+              </a:rPr>
+              <a:t>•  que quiere resistir el análisis para sobrevivir más tiempo. Conocerlas es imprescindible por dos</a:t>
+            </a:r>
+          </a:p>
+          <a:p>
+            <a:pPr>
+              <a:spcAft>
+                <a:spcPts val="600"/>
+              </a:spcAft>
+            </a:pPr>
+            <a:r>
+              <a:rPr sz="1500">
+                <a:solidFill>
+                  <a:srgbClr val="22282E"/>
+                </a:solidFill>
+              </a:rPr>
+              <a:t>•  razones simétricas: para reconocerlas y derrotarlas al analizar código protegido, y para</a:t>
+            </a:r>
+          </a:p>
+          <a:p>
+            <a:pPr>
+              <a:spcAft>
+                <a:spcPts val="600"/>
+              </a:spcAft>
+            </a:pPr>
+            <a:r>
+              <a:rPr sz="1500">
+                <a:solidFill>
+                  <a:srgbClr val="22282E"/>
+                </a:solidFill>
+              </a:rPr>
+              <a:t>•  entender el juego del gato y el ratón que define el análisis de malware moderno. Ninguna técnica</a:t>
+            </a:r>
+          </a:p>
+          <a:p>
+            <a:pPr>
+              <a:spcAft>
+                <a:spcPts val="600"/>
+              </a:spcAft>
+            </a:pPr>
+            <a:r>
+              <a:rPr sz="1500">
+                <a:solidFill>
+                  <a:srgbClr val="22282E"/>
+                </a:solidFill>
+              </a:rPr>
+              <a:t>•  es infalible —todas se pueden vencer con tiempo y con análisis dinámico— pero elevan el coste, que es</a:t>
             </a:r>
           </a:p>
         </p:txBody>
@@ -4301,7 +4677,7 @@
                   <a:srgbClr val="0B3D2E"/>
                 </a:solidFill>
               </a:rPr>
-              <a:t>🧰 Herramientas y preparación</a:t>
+              <a:t>📖 Definiciones y características</a:t>
             </a:r>
           </a:p>
         </p:txBody>
@@ -4339,37 +4715,97 @@
                   <a:srgbClr val="22282E"/>
                 </a:solidFill>
               </a:rPr>
-              <a:t>•  sudo apt install -y upx binutils</a:t>
-            </a:r>
-          </a:p>
-          <a:p>
-            <a:pPr>
-              <a:spcAft>
-                <a:spcPts val="600"/>
-              </a:spcAft>
-            </a:pPr>
-            <a:r>
-              <a:rPr sz="1500">
-                <a:solidFill>
-                  <a:srgbClr val="22282E"/>
-                </a:solidFill>
-              </a:rPr>
-              <a:t>•  pip install angr        # ejecución simbólica (deofuscación)</a:t>
-            </a:r>
-          </a:p>
-          <a:p>
-            <a:pPr>
-              <a:spcAft>
-                <a:spcPts val="600"/>
-              </a:spcAft>
-            </a:pPr>
-            <a:r>
-              <a:rPr sz="1500">
-                <a:solidFill>
-                  <a:srgbClr val="22282E"/>
-                </a:solidFill>
-              </a:rPr>
-              <a:t>•  Trabaja en VM aislada con snapshots si manipulas muestras reales.</a:t>
+              <a:t>•  Packing: comprime/cifra el binario y lo descomprime en memoria al ejecutar. Clave: el estático</a:t>
+            </a:r>
+          </a:p>
+          <a:p>
+            <a:pPr>
+              <a:spcAft>
+                <a:spcPts val="600"/>
+              </a:spcAft>
+            </a:pPr>
+            <a:r>
+              <a:rPr sz="1500">
+                <a:solidFill>
+                  <a:srgbClr val="22282E"/>
+                </a:solidFill>
+              </a:rPr>
+              <a:t>•  solo ve el stub; hay que dumpear tras el unpacking.</a:t>
+            </a:r>
+          </a:p>
+          <a:p>
+            <a:pPr>
+              <a:spcAft>
+                <a:spcPts val="600"/>
+              </a:spcAft>
+            </a:pPr>
+            <a:r>
+              <a:rPr sz="1500">
+                <a:solidFill>
+                  <a:srgbClr val="22282E"/>
+                </a:solidFill>
+              </a:rPr>
+              <a:t>•  Entropía: medida de aleatoriedad; secciones empacadas/cifradas tienen entropía alta (~8). Clave:</a:t>
+            </a:r>
+          </a:p>
+          <a:p>
+            <a:pPr>
+              <a:spcAft>
+                <a:spcPts val="600"/>
+              </a:spcAft>
+            </a:pPr>
+            <a:r>
+              <a:rPr sz="1500">
+                <a:solidFill>
+                  <a:srgbClr val="22282E"/>
+                </a:solidFill>
+              </a:rPr>
+              <a:t>•  primer indicador de ofuscación.</a:t>
+            </a:r>
+          </a:p>
+          <a:p>
+            <a:pPr>
+              <a:spcAft>
+                <a:spcPts val="600"/>
+              </a:spcAft>
+            </a:pPr>
+            <a:r>
+              <a:rPr sz="1500">
+                <a:solidFill>
+                  <a:srgbClr val="22282E"/>
+                </a:solidFill>
+              </a:rPr>
+              <a:t>•  Anti-debugging: detecta debuggers (p. ej. ptrace(PTRACETRACEME) que falla si ya hay uno).</a:t>
+            </a:r>
+          </a:p>
+          <a:p>
+            <a:pPr>
+              <a:spcAft>
+                <a:spcPts val="600"/>
+              </a:spcAft>
+            </a:pPr>
+            <a:r>
+              <a:rPr sz="1500">
+                <a:solidFill>
+                  <a:srgbClr val="22282E"/>
+                </a:solidFill>
+              </a:rPr>
+              <a:t>•  Clave: se neutraliza parcheando el chequeo o con LDPRELOAD.</a:t>
+            </a:r>
+          </a:p>
+          <a:p>
+            <a:pPr>
+              <a:spcAft>
+                <a:spcPts val="600"/>
+              </a:spcAft>
+            </a:pPr>
+            <a:r>
+              <a:rPr sz="1500">
+                <a:solidFill>
+                  <a:srgbClr val="22282E"/>
+                </a:solidFill>
+              </a:rPr>
+              <a:t>•  Anti-VM: busca artefactos de virtualización (drivers, MAC, timing). Clave: frecuente en malware</a:t>
             </a:r>
           </a:p>
         </p:txBody>
@@ -4420,7 +4856,7 @@
                   <a:srgbClr val="0B3D2E"/>
                 </a:solidFill>
               </a:rPr>
-              <a:t>🧪 Laboratorio guiado</a:t>
+              <a:t>📔 Glosario</a:t>
             </a:r>
           </a:p>
         </p:txBody>
@@ -4458,97 +4894,97 @@
                   <a:srgbClr val="22282E"/>
                 </a:solidFill>
               </a:rPr>
-              <a:t>•  Detecta packing por entropía y secciones:</a:t>
-            </a:r>
-          </a:p>
-          <a:p>
-            <a:pPr>
-              <a:spcAft>
-                <a:spcPts val="600"/>
-              </a:spcAft>
-            </a:pPr>
-            <a:r>
-              <a:rPr sz="1500">
-                <a:solidFill>
-                  <a:srgbClr val="22282E"/>
-                </a:solidFill>
-              </a:rPr>
-              <a:t>•  upx -t crackme.packed 2&gt;/dev/null &amp;&amp; echo "empacado con UPX"</a:t>
-            </a:r>
-          </a:p>
-          <a:p>
-            <a:pPr>
-              <a:spcAft>
-                <a:spcPts val="600"/>
-              </a:spcAft>
-            </a:pPr>
-            <a:r>
-              <a:rPr sz="1500">
-                <a:solidFill>
-                  <a:srgbClr val="22282E"/>
-                </a:solidFill>
-              </a:rPr>
-              <a:t>•  python3 - &lt;&lt;'PY'</a:t>
-            </a:r>
-          </a:p>
-          <a:p>
-            <a:pPr>
-              <a:spcAft>
-                <a:spcPts val="600"/>
-              </a:spcAft>
-            </a:pPr>
-            <a:r>
-              <a:rPr sz="1500">
-                <a:solidFill>
-                  <a:srgbClr val="22282E"/>
-                </a:solidFill>
-              </a:rPr>
-              <a:t>•  import math,sys</a:t>
-            </a:r>
-          </a:p>
-          <a:p>
-            <a:pPr>
-              <a:spcAft>
-                <a:spcPts val="600"/>
-              </a:spcAft>
-            </a:pPr>
-            <a:r>
-              <a:rPr sz="1500">
-                <a:solidFill>
-                  <a:srgbClr val="22282E"/>
-                </a:solidFill>
-              </a:rPr>
-              <a:t>•  d=open("crackme.packed","rb").read()</a:t>
-            </a:r>
-          </a:p>
-          <a:p>
-            <a:pPr>
-              <a:spcAft>
-                <a:spcPts val="600"/>
-              </a:spcAft>
-            </a:pPr>
-            <a:r>
-              <a:rPr sz="1500">
-                <a:solidFill>
-                  <a:srgbClr val="22282E"/>
-                </a:solidFill>
-              </a:rPr>
-              <a:t>•  from collections import Counter</a:t>
-            </a:r>
-          </a:p>
-          <a:p>
-            <a:pPr>
-              <a:spcAft>
-                <a:spcPts val="600"/>
-              </a:spcAft>
-            </a:pPr>
-            <a:r>
-              <a:rPr sz="1500">
-                <a:solidFill>
-                  <a:srgbClr val="22282E"/>
-                </a:solidFill>
-              </a:rPr>
-              <a:t>•  c=Counter(d); H=-sum(n/len(d)math.log2(n/len(d)) for n in c.values())</a:t>
+              <a:t>•  Término — Definición concisa</a:t>
+            </a:r>
+          </a:p>
+          <a:p>
+            <a:pPr>
+              <a:spcAft>
+                <a:spcPts val="600"/>
+              </a:spcAft>
+            </a:pPr>
+            <a:r>
+              <a:rPr sz="1500">
+                <a:solidFill>
+                  <a:srgbClr val="22282E"/>
+                </a:solidFill>
+              </a:rPr>
+              <a:t>•  Ofuscación — Técnicas para dificultar el análisis del binario</a:t>
+            </a:r>
+          </a:p>
+          <a:p>
+            <a:pPr>
+              <a:spcAft>
+                <a:spcPts val="600"/>
+              </a:spcAft>
+            </a:pPr>
+            <a:r>
+              <a:rPr sz="1500">
+                <a:solidFill>
+                  <a:srgbClr val="22282E"/>
+                </a:solidFill>
+              </a:rPr>
+              <a:t>•  Anti-reversing — Medidas que impiden o encarecen la RE</a:t>
+            </a:r>
+          </a:p>
+          <a:p>
+            <a:pPr>
+              <a:spcAft>
+                <a:spcPts val="600"/>
+              </a:spcAft>
+            </a:pPr>
+            <a:r>
+              <a:rPr sz="1500">
+                <a:solidFill>
+                  <a:srgbClr val="22282E"/>
+                </a:solidFill>
+              </a:rPr>
+              <a:t>•  Packing — Comprimir/cifrar el código; un stub lo revela en memoria</a:t>
+            </a:r>
+          </a:p>
+          <a:p>
+            <a:pPr>
+              <a:spcAft>
+                <a:spcPts val="600"/>
+              </a:spcAft>
+            </a:pPr>
+            <a:r>
+              <a:rPr sz="1500">
+                <a:solidFill>
+                  <a:srgbClr val="22282E"/>
+                </a:solidFill>
+              </a:rPr>
+              <a:t>•  Stub / desempaquetador — Código que descomprime el binario real al ejecutarse</a:t>
+            </a:r>
+          </a:p>
+          <a:p>
+            <a:pPr>
+              <a:spcAft>
+                <a:spcPts val="600"/>
+              </a:spcAft>
+            </a:pPr>
+            <a:r>
+              <a:rPr sz="1500">
+                <a:solidFill>
+                  <a:srgbClr val="22282E"/>
+                </a:solidFill>
+              </a:rPr>
+              <a:t>•  Entropía — Aleatoriedad; alta indica cifrado o compresión</a:t>
+            </a:r>
+          </a:p>
+          <a:p>
+            <a:pPr>
+              <a:spcAft>
+                <a:spcPts val="600"/>
+              </a:spcAft>
+            </a:pPr>
+            <a:r>
+              <a:rPr sz="1500">
+                <a:solidFill>
+                  <a:srgbClr val="22282E"/>
+                </a:solidFill>
+              </a:rPr>
+              <a:t>•  OEP — Original entry point; donde termina el desempaquetado</a:t>
             </a:r>
           </a:p>
         </p:txBody>
@@ -4599,7 +5035,7 @@
                   <a:srgbClr val="0B3D2E"/>
                 </a:solidFill>
               </a:rPr>
-              <a:t>✍️ Ejercicios</a:t>
+              <a:t>🧰 Herramientas y preparación</a:t>
             </a:r>
           </a:p>
         </p:txBody>
@@ -4637,82 +5073,7 @@
                   <a:srgbClr val="22282E"/>
                 </a:solidFill>
               </a:rPr>
-              <a:t>•  Calcula la entropía de un binario normal y de uno empacado; compara.</a:t>
-            </a:r>
-          </a:p>
-          <a:p>
-            <a:pPr>
-              <a:spcAft>
-                <a:spcPts val="600"/>
-              </a:spcAft>
-            </a:pPr>
-            <a:r>
-              <a:rPr sz="1500">
-                <a:solidFill>
-                  <a:srgbClr val="22282E"/>
-                </a:solidFill>
-              </a:rPr>
-              <a:t>•  Desempaqueta un UPX y confirma con objdump que ves más funciones.</a:t>
-            </a:r>
-          </a:p>
-          <a:p>
-            <a:pPr>
-              <a:spcAft>
-                <a:spcPts val="600"/>
-              </a:spcAft>
-            </a:pPr>
-            <a:r>
-              <a:rPr sz="1500">
-                <a:solidFill>
-                  <a:srgbClr val="22282E"/>
-                </a:solidFill>
-              </a:rPr>
-              <a:t>•  Parchea un chequeo ptrace para permitir el debugging.</a:t>
-            </a:r>
-          </a:p>
-          <a:p>
-            <a:pPr>
-              <a:spcAft>
-                <a:spcPts val="600"/>
-              </a:spcAft>
-            </a:pPr>
-            <a:r>
-              <a:rPr sz="1500">
-                <a:solidFill>
-                  <a:srgbClr val="22282E"/>
-                </a:solidFill>
-              </a:rPr>
-              <a:t>•  Intercepta el anti-debug con Frida sin modificar el binario.</a:t>
-            </a:r>
-          </a:p>
-          <a:p>
-            <a:pPr>
-              <a:spcAft>
-                <a:spcPts val="600"/>
-              </a:spcAft>
-            </a:pPr>
-            <a:r>
-              <a:rPr sz="1500">
-                <a:solidFill>
-                  <a:srgbClr val="22282E"/>
-                </a:solidFill>
-              </a:rPr>
-              <a:t>•  Resuelve un crackme con angr y explica sus límites (state explosion).</a:t>
-            </a:r>
-          </a:p>
-          <a:p>
-            <a:pPr>
-              <a:spcAft>
-                <a:spcPts val="600"/>
-              </a:spcAft>
-            </a:pPr>
-            <a:r>
-              <a:rPr sz="1500">
-                <a:solidFill>
-                  <a:srgbClr val="22282E"/>
-                </a:solidFill>
-              </a:rPr>
-              <a:t>•  Identifica el dispatcher de un binario con control-flow flattening.</a:t>
+              <a:t>•  Trabaja en VM aislada con snapshots si manipulas muestras reales.</a:t>
             </a:r>
           </a:p>
         </p:txBody>
@@ -4763,7 +5124,7 @@
                   <a:srgbClr val="0B3D2E"/>
                 </a:solidFill>
               </a:rPr>
-              <a:t>📝 Reto verificable</a:t>
+              <a:t>🧪 Laboratorio guiado</a:t>
             </a:r>
           </a:p>
         </p:txBody>
@@ -4801,52 +5162,97 @@
                   <a:srgbClr val="22282E"/>
                 </a:solidFill>
               </a:rPr>
-              <a:t>•  Toma un crackme empacado con anti-debugging y consigue analizarlo: desempácalo, neutraliza el</a:t>
-            </a:r>
-          </a:p>
-          <a:p>
-            <a:pPr>
-              <a:spcAft>
-                <a:spcPts val="600"/>
-              </a:spcAft>
-            </a:pPr>
-            <a:r>
-              <a:rPr sz="1500">
-                <a:solidFill>
-                  <a:srgbClr val="22282E"/>
-                </a:solidFill>
-              </a:rPr>
-              <a:t>•  anti-debug y deduce la clave.</a:t>
-            </a:r>
-          </a:p>
-          <a:p>
-            <a:pPr>
-              <a:spcAft>
-                <a:spcPts val="600"/>
-              </a:spcAft>
-            </a:pPr>
-            <a:r>
-              <a:rPr sz="1500">
-                <a:solidFill>
-                  <a:srgbClr val="22282E"/>
-                </a:solidFill>
-              </a:rPr>
-              <a:t>•  Criterio de aceptación: logras adjuntar un debugger pese al anti-debug (parcheo o Frida) y obtienes</a:t>
-            </a:r>
-          </a:p>
-          <a:p>
-            <a:pPr>
-              <a:spcAft>
-                <a:spcPts val="600"/>
-              </a:spcAft>
-            </a:pPr>
-            <a:r>
-              <a:rPr sz="1500">
-                <a:solidFill>
-                  <a:srgbClr val="22282E"/>
-                </a:solidFill>
-              </a:rPr>
-              <a:t>•  la clave válida del binario desempacado.</a:t>
+              <a:t>•  Detecta packing por entropía y secciones:</a:t>
+            </a:r>
+          </a:p>
+          <a:p>
+            <a:pPr>
+              <a:spcAft>
+                <a:spcPts val="600"/>
+              </a:spcAft>
+            </a:pPr>
+            <a:r>
+              <a:rPr sz="1500">
+                <a:solidFill>
+                  <a:srgbClr val="22282E"/>
+                </a:solidFill>
+              </a:rPr>
+              <a:t>•  Desempaqueta UPX y verifica que ahora ves el código real:</a:t>
+            </a:r>
+          </a:p>
+          <a:p>
+            <a:pPr>
+              <a:spcAft>
+                <a:spcPts val="600"/>
+              </a:spcAft>
+            </a:pPr>
+            <a:r>
+              <a:rPr sz="1500">
+                <a:solidFill>
+                  <a:srgbClr val="22282E"/>
+                </a:solidFill>
+              </a:rPr>
+              <a:t>•  Neutraliza anti-debugging basado en ptrace: identifica el chequeo en Ghidra y parchea el salto</a:t>
+            </a:r>
+          </a:p>
+          <a:p>
+            <a:pPr>
+              <a:spcAft>
+                <a:spcPts val="600"/>
+              </a:spcAft>
+            </a:pPr>
+            <a:r>
+              <a:rPr sz="1500">
+                <a:solidFill>
+                  <a:srgbClr val="22282E"/>
+                </a:solidFill>
+              </a:rPr>
+              <a:t>•  (invierte je↔jne) o intercepta ptrace con Frida devolviendo 0.</a:t>
+            </a:r>
+          </a:p>
+          <a:p>
+            <a:pPr>
+              <a:spcAft>
+                <a:spcPts val="600"/>
+              </a:spcAft>
+            </a:pPr>
+            <a:r>
+              <a:rPr sz="1500">
+                <a:solidFill>
+                  <a:srgbClr val="22282E"/>
+                </a:solidFill>
+              </a:rPr>
+              <a:t>•  Descifra cadenas en runtime: pon un breakpoint tras la rutina de descifrado y dumpea memoria</a:t>
+            </a:r>
+          </a:p>
+          <a:p>
+            <a:pPr>
+              <a:spcAft>
+                <a:spcPts val="600"/>
+              </a:spcAft>
+            </a:pPr>
+            <a:r>
+              <a:rPr sz="1500">
+                <a:solidFill>
+                  <a:srgbClr val="22282E"/>
+                </a:solidFill>
+              </a:rPr>
+              <a:t>•  (dump memory strings.bin $addr $addr+0x200).</a:t>
+            </a:r>
+          </a:p>
+          <a:p>
+            <a:pPr>
+              <a:spcAft>
+                <a:spcPts val="600"/>
+              </a:spcAft>
+            </a:pPr>
+            <a:r>
+              <a:rPr sz="1500">
+                <a:solidFill>
+                  <a:srgbClr val="22282E"/>
+                </a:solidFill>
+              </a:rPr>
+              <a:t>•  Enfréntate a control-flow flattening con angr (ejecución simbólica) para hallar la entrada que llega</a:t>
             </a:r>
           </a:p>
         </p:txBody>
